--- a/toni-black/presentation/ToniBlack_Timeline_Budget.pptx
+++ b/toni-black/presentation/ToniBlack_Timeline_Budget.pptx
@@ -1338,7 +1338,7 @@
                 <a:ea typeface="Zalando Sans Expanded" pitchFamily="34" charset="-122"/>
                 <a:cs typeface="Zalando Sans Expanded" pitchFamily="34" charset="-120"/>
               </a:rPr>
-              <a:t>Program Affiliate  ·  September</a:t>
+              <a:t>Affiliate Program  ·  September</a:t>
             </a:r>
             <a:endParaRPr lang="en-US" sz="1050" dirty="0"/>
           </a:p>
@@ -1439,7 +1439,7 @@
                 <a:ea typeface="Arimo" pitchFamily="34" charset="-122"/>
                 <a:cs typeface="Arimo" pitchFamily="34" charset="-120"/>
               </a:rPr>
-              <a:t>Rencana kerja menuju 30 affiliate, dan alokasi biaya iklan yang menopangnya.</a:t>
+              <a:t>Thirty affiliates by the end of September. The plan, and the budget behind it.</a:t>
             </a:r>
             <a:endParaRPr lang="en-US" sz="1400" dirty="0"/>
           </a:p>
@@ -1810,7 +1810,7 @@
                 <a:ea typeface="Zalando Sans Expanded" pitchFamily="34" charset="-122"/>
                 <a:cs typeface="Zalando Sans Expanded" pitchFamily="34" charset="-120"/>
               </a:rPr>
-              <a:t>Menuju 30 affiliate</a:t>
+              <a:t>Week by week to thirty</a:t>
             </a:r>
             <a:endParaRPr lang="en-US" sz="3400" dirty="0"/>
           </a:p>
@@ -1860,7 +1860,7 @@
                           <a:ea typeface="Zalando Sans Expanded" pitchFamily="34" charset="-122"/>
                           <a:cs typeface="Zalando Sans Expanded" pitchFamily="34" charset="-120"/>
                         </a:rPr>
-                        <a:t>Periode</a:t>
+                        <a:t>Period</a:t>
                       </a:r>
                       <a:endParaRPr lang="en-US" sz="1050" dirty="0">
                         <a:latin typeface="Zalando Sans Expanded" charset="0"/>
@@ -1928,7 +1928,7 @@
                           <a:ea typeface="Zalando Sans Expanded" pitchFamily="34" charset="-122"/>
                           <a:cs typeface="Zalando Sans Expanded" pitchFamily="34" charset="-120"/>
                         </a:rPr>
-                        <a:t>Aktivitas</a:t>
+                        <a:t>Activity</a:t>
                       </a:r>
                       <a:endParaRPr lang="en-US" sz="1050" dirty="0">
                         <a:latin typeface="Zalando Sans Expanded" charset="0"/>
@@ -2734,7 +2734,7 @@
                 <a:ea typeface="Zalando Sans Expanded" pitchFamily="34" charset="-122"/>
                 <a:cs typeface="Zalando Sans Expanded" pitchFamily="34" charset="-120"/>
               </a:rPr>
-              <a:t>Target akhir bulan</a:t>
+              <a:t>Month-end target</a:t>
             </a:r>
             <a:endParaRPr lang="en-US" sz="1050" dirty="0"/>
           </a:p>
@@ -2773,7 +2773,7 @@
                 <a:ea typeface="Zalando Sans Expanded" pitchFamily="34" charset="-122"/>
                 <a:cs typeface="Zalando Sans Expanded" pitchFamily="34" charset="-120"/>
               </a:rPr>
-              <a:t>30 Affiliate</a:t>
+              <a:t>30 Affiliates</a:t>
             </a:r>
             <a:endParaRPr lang="en-US" sz="2200" dirty="0"/>
           </a:p>
@@ -3261,7 +3261,7 @@
         <p:spPr>
           <a:xfrm>
             <a:off x="640080" y="1664208"/>
-            <a:ext cx="6217920" cy="640080"/>
+            <a:ext cx="6858000" cy="640080"/>
           </a:xfrm>
           <a:prstGeom prst="rect">
             <a:avLst/>
@@ -3285,7 +3285,7 @@
                 <a:ea typeface="Zalando Sans Expanded" pitchFamily="34" charset="-122"/>
                 <a:cs typeface="Zalando Sans Expanded" pitchFamily="34" charset="-120"/>
               </a:rPr>
-              <a:t>Alokasi budget</a:t>
+              <a:t>Where the budget goes</a:t>
             </a:r>
             <a:endParaRPr lang="en-US" sz="3400" dirty="0"/>
           </a:p>
@@ -3651,7 +3651,7 @@
                           <a:ea typeface="Zalando Sans Expanded" pitchFamily="34" charset="-122"/>
                           <a:cs typeface="Zalando Sans Expanded" pitchFamily="34" charset="-120"/>
                         </a:rPr>
-                        <a:t>Pos</a:t>
+                        <a:t>Channel</a:t>
                       </a:r>
                       <a:endParaRPr lang="en-US" sz="1050" dirty="0">
                         <a:latin typeface="Zalando Sans Expanded" charset="0"/>
@@ -3719,7 +3719,7 @@
                           <a:ea typeface="Zalando Sans Expanded" pitchFamily="34" charset="-122"/>
                           <a:cs typeface="Zalando Sans Expanded" pitchFamily="34" charset="-120"/>
                         </a:rPr>
-                        <a:t>Alokasi</a:t>
+                        <a:t>Allocation</a:t>
                       </a:r>
                       <a:endParaRPr lang="en-US" sz="1050" dirty="0">
                         <a:latin typeface="Zalando Sans Expanded" charset="0"/>
@@ -5025,7 +5025,7 @@
                 <a:ea typeface="Arimo" pitchFamily="34" charset="-122"/>
                 <a:cs typeface="Arimo" pitchFamily="34" charset="-120"/>
               </a:rPr>
-              <a:t>*  Tambahkan keterangan untuk pos ini.</a:t>
+              <a:t>*  Add the note for this line.</a:t>
             </a:r>
             <a:endParaRPr lang="en-US" sz="1100" dirty="0"/>
           </a:p>

--- a/toni-black/presentation/ToniBlack_Timeline_Budget.pptx
+++ b/toni-black/presentation/ToniBlack_Timeline_Budget.pptx
@@ -820,7 +820,7 @@
           <a:p>
             <a:r>
               <a:rPr lang="en-US" dirty="0"/>
-              <a:t>Timeline per minggu di kiri. Target, fokus produk, dan skema komisi di kanan. Label periode dirapikan dari catatan asli, isinya tidak diubah.</a:t>
+              <a:t>Timeline per minggu di kiri. Target, fokus produk, dan skema komisi di kanan. Isi aktivitas ditulis ulang mengikuti Writing Style Toni Black — kalimat aktif, langsung ke inti. Angka dan urutan kerjanya tidak berubah dari catatan asli.</a:t>
             </a:r>
             <a:endParaRPr lang="en-US" dirty="0"/>
           </a:p>
@@ -908,7 +908,7 @@
           <a:p>
             <a:r>
               <a:rPr lang="en-US" dirty="0"/>
-              <a:t>Total 24 juta sudah dicek: 7 + 7 + 10. Target revenue 72 juta adalah turunan dari ROAS 3 x budget 24 juta. Ganti keterangan tanda bintang sesuai kesepakatan. Grafik bisa diubah lewat klik kanan &gt; Edit Data.</a:t>
+              <a:t>Total 24 juta sudah dicek: 7 + 7 + 10. Target revenue 48 juta adalah turunan dari ROAS 2 x budget 24 juta. Ganti keterangan tanda bintang sesuai kesepakatan. Grafik bisa diubah lewat klik kanan &gt; Edit Data.</a:t>
             </a:r>
             <a:endParaRPr lang="en-US" dirty="0"/>
           </a:p>
@@ -1771,7 +1771,7 @@
                 <a:ea typeface="Zalando Sans Expanded" pitchFamily="34" charset="-122"/>
                 <a:cs typeface="Zalando Sans Expanded" pitchFamily="34" charset="-120"/>
               </a:rPr>
-              <a:t>01  ·  Timeline</a:t>
+              <a:t>01  ·  Timeline  ·  September</a:t>
             </a:r>
             <a:endParaRPr lang="en-US" sz="1050" dirty="0"/>
           </a:p>
@@ -1839,8 +1839,8 @@
             <a:tbl>
               <a:tblPr/>
               <a:tblGrid>
-                <a:gridCol w="2103120"/>
-                <a:gridCol w="4754880"/>
+                <a:gridCol w="1965960"/>
+                <a:gridCol w="4892040"/>
               </a:tblGrid>
               <a:tr h="548640">
                 <a:tc>
@@ -1998,7 +1998,7 @@
                           <a:ea typeface="Zalando Sans Expanded" pitchFamily="34" charset="-122"/>
                           <a:cs typeface="Zalando Sans Expanded" pitchFamily="34" charset="-120"/>
                         </a:rPr>
-                        <a:t>Akhir Agustus</a:t>
+                        <a:t>Late August</a:t>
                       </a:r>
                       <a:endParaRPr lang="en-US" sz="1100" dirty="0">
                         <a:latin typeface="Zalando Sans Expanded" charset="0"/>
@@ -2066,7 +2066,7 @@
                           <a:ea typeface="Arimo" pitchFamily="34" charset="-122"/>
                           <a:cs typeface="Arimo" pitchFamily="34" charset="-120"/>
                         </a:rPr>
-                        <a:t>Buat fake order bertahap, sembari menyusun list affiliate</a:t>
+                        <a:t>Place the fake orders in stages. Build the affiliate list alongside.</a:t>
                       </a:r>
                       <a:endParaRPr lang="en-US" sz="1150" dirty="0">
                         <a:latin typeface="Arimo" charset="0"/>
@@ -2136,7 +2136,7 @@
                           <a:ea typeface="Zalando Sans Expanded" pitchFamily="34" charset="-122"/>
                           <a:cs typeface="Zalando Sans Expanded" pitchFamily="34" charset="-120"/>
                         </a:rPr>
-                        <a:t>Minggu 1 September</a:t>
+                        <a:t>Week 1</a:t>
                       </a:r>
                       <a:endParaRPr lang="en-US" sz="1100" dirty="0">
                         <a:latin typeface="Zalando Sans Expanded" charset="0"/>
@@ -2204,7 +2204,7 @@
                           <a:ea typeface="Arimo" pitchFamily="34" charset="-122"/>
                           <a:cs typeface="Arimo" pitchFamily="34" charset="-120"/>
                         </a:rPr>
-                        <a:t>Pastikan semua orderan sudah sampai dan sudah direview. Targetkan menghubungi 30 affiliate</a:t>
+                        <a:t>Get all orders delivered and reviewed. Contact 30 affiliates.</a:t>
                       </a:r>
                       <a:endParaRPr lang="en-US" sz="1150" dirty="0">
                         <a:latin typeface="Arimo" charset="0"/>
@@ -2274,7 +2274,7 @@
                           <a:ea typeface="Zalando Sans Expanded" pitchFamily="34" charset="-122"/>
                           <a:cs typeface="Zalando Sans Expanded" pitchFamily="34" charset="-120"/>
                         </a:rPr>
-                        <a:t>Minggu 2 September</a:t>
+                        <a:t>Week 2</a:t>
                       </a:r>
                       <a:endParaRPr lang="en-US" sz="1100" dirty="0">
                         <a:latin typeface="Zalando Sans Expanded" charset="0"/>
@@ -2342,7 +2342,7 @@
                           <a:ea typeface="Arimo" pitchFamily="34" charset="-122"/>
                           <a:cs typeface="Arimo" pitchFamily="34" charset="-120"/>
                         </a:rPr>
-                        <a:t>Kirim barang ke minimal 10 affiliate, dan hubungi 30 affiliate berikutnya</a:t>
+                        <a:t>Ship to at least 10 affiliates. Contact the next 30.</a:t>
                       </a:r>
                       <a:endParaRPr lang="en-US" sz="1150" dirty="0">
                         <a:latin typeface="Arimo" charset="0"/>
@@ -2412,7 +2412,7 @@
                           <a:ea typeface="Zalando Sans Expanded" pitchFamily="34" charset="-122"/>
                           <a:cs typeface="Zalando Sans Expanded" pitchFamily="34" charset="-120"/>
                         </a:rPr>
-                        <a:t>Minggu 3 September</a:t>
+                        <a:t>Week 3</a:t>
                       </a:r>
                       <a:endParaRPr lang="en-US" sz="1100" dirty="0">
                         <a:latin typeface="Zalando Sans Expanded" charset="0"/>
@@ -2480,7 +2480,7 @@
                           <a:ea typeface="Arimo" pitchFamily="34" charset="-122"/>
                           <a:cs typeface="Arimo" pitchFamily="34" charset="-120"/>
                         </a:rPr>
-                        <a:t>Kirim barang ke minimal 20 affiliate lainnya</a:t>
+                        <a:t>Ship to at least 20 more affiliates.</a:t>
                       </a:r>
                       <a:endParaRPr lang="en-US" sz="1150" dirty="0">
                         <a:latin typeface="Arimo" charset="0"/>
@@ -2550,7 +2550,7 @@
                           <a:ea typeface="Zalando Sans Expanded" pitchFamily="34" charset="-122"/>
                           <a:cs typeface="Zalando Sans Expanded" pitchFamily="34" charset="-120"/>
                         </a:rPr>
-                        <a:t>Minggu 4 &amp; seterusnya</a:t>
+                        <a:t>Week 4 onward</a:t>
                       </a:r>
                       <a:endParaRPr lang="en-US" sz="1100" dirty="0">
                         <a:latin typeface="Zalando Sans Expanded" charset="0"/>
@@ -2618,7 +2618,7 @@
                           <a:ea typeface="Arimo" pitchFamily="34" charset="-122"/>
                           <a:cs typeface="Arimo" pitchFamily="34" charset="-120"/>
                         </a:rPr>
-                        <a:t>Mencari dan menghubungi affiliator baru</a:t>
+                        <a:t>Keep finding new affiliates. Keep contacting them.</a:t>
                       </a:r>
                       <a:endParaRPr lang="en-US" sz="1150" dirty="0">
                         <a:latin typeface="Arimo" charset="0"/>
@@ -3495,7 +3495,7 @@
                 <a:ea typeface="Zalando Sans Expanded" pitchFamily="34" charset="-122"/>
                 <a:cs typeface="Zalando Sans Expanded" pitchFamily="34" charset="-120"/>
               </a:rPr>
-              <a:t>3×</a:t>
+              <a:t>2×</a:t>
             </a:r>
             <a:endParaRPr lang="en-US" sz="2100" dirty="0"/>
           </a:p>
@@ -3600,7 +3600,7 @@
                 <a:ea typeface="Zalando Sans Expanded" pitchFamily="34" charset="-122"/>
                 <a:cs typeface="Zalando Sans Expanded" pitchFamily="34" charset="-120"/>
               </a:rPr>
-              <a:t>Rp 72.000.000</a:t>
+              <a:t>Rp 48.000.000</a:t>
             </a:r>
             <a:endParaRPr lang="en-US" sz="2100" dirty="0"/>
           </a:p>

--- a/toni-black/presentation/ToniBlack_Timeline_Budget.pptx
+++ b/toni-black/presentation/ToniBlack_Timeline_Budget.pptx
@@ -732,7 +732,7 @@
           <a:p>
             <a:r>
               <a:rPr lang="en-US" dirty="0"/>
-              <a:t>Ganti nama tim dan tanggal sebelum presentasi.</a:t>
+              <a:t>Slide pembuka. Isinya sudah lengkap, tidak ada yang perlu diganti.</a:t>
             </a:r>
             <a:endParaRPr lang="en-US" dirty="0"/>
           </a:p>
@@ -908,7 +908,7 @@
           <a:p>
             <a:r>
               <a:rPr lang="en-US" dirty="0"/>
-              <a:t>Total 24 juta sudah dicek: 7 + 7 + 10. Target revenue 48 juta adalah turunan dari ROAS 2 x budget 24 juta. Ganti keterangan tanda bintang sesuai kesepakatan. Grafik bisa diubah lewat klik kanan &gt; Edit Data.</a:t>
+              <a:t>Total 24 juta sudah dicek: 7 + 7 + 10. Target revenue 48 juta adalah turunan dari ROAS 2 x budget 24 juta. Pos Live Affiliate dipakai hanya kalau ada affiliate yang bisa diajak live selling. Grafik bisa diubah lewat klik kanan &gt; Edit Data.</a:t>
             </a:r>
             <a:endParaRPr lang="en-US" dirty="0"/>
           </a:p>
@@ -1609,7 +1609,7 @@
         </p:nvSpPr>
         <p:spPr>
           <a:xfrm>
-            <a:off x="6766560" y="5577840"/>
+            <a:off x="6797010" y="5577840"/>
             <a:ext cx="4754880" cy="365760"/>
           </a:xfrm>
           <a:prstGeom prst="rect">
@@ -1648,7 +1648,7 @@
                 <a:ea typeface="Arimo" pitchFamily="34" charset="-122"/>
                 <a:cs typeface="Arimo" pitchFamily="34" charset="-120"/>
               </a:rPr>
-              <a:t>Team name</a:t>
+              <a:t>Affimarq</a:t>
             </a:r>
             <a:pPr algn="r" indent="0" marL="0">
               <a:buNone/>
@@ -1676,7 +1676,7 @@
                 <a:ea typeface="Arimo" pitchFamily="34" charset="-122"/>
                 <a:cs typeface="Arimo" pitchFamily="34" charset="-120"/>
               </a:rPr>
-              <a:t>DD Month YYYY</a:t>
+              <a:t>25 August 2026</a:t>
             </a:r>
             <a:endParaRPr lang="en-US" sz="1150" dirty="0"/>
           </a:p>
@@ -1842,7 +1842,7 @@
                 <a:gridCol w="1965960"/>
                 <a:gridCol w="4892040"/>
               </a:tblGrid>
-              <a:tr h="548640">
+              <a:tr h="582168">
                 <a:tc>
                   <a:txBody>
                     <a:bodyPr/>
@@ -1980,7 +1980,7 @@
                   </a:tcPr>
                 </a:tc>
               </a:tr>
-              <a:tr h="548640">
+              <a:tr h="582168">
                 <a:tc>
                   <a:txBody>
                     <a:bodyPr/>
@@ -2118,7 +2118,7 @@
                   </a:tcPr>
                 </a:tc>
               </a:tr>
-              <a:tr h="548640">
+              <a:tr h="582168">
                 <a:tc>
                   <a:txBody>
                     <a:bodyPr/>
@@ -2256,7 +2256,7 @@
                   </a:tcPr>
                 </a:tc>
               </a:tr>
-              <a:tr h="548640">
+              <a:tr h="582168">
                 <a:tc>
                   <a:txBody>
                     <a:bodyPr/>
@@ -2394,7 +2394,7 @@
                   </a:tcPr>
                 </a:tc>
               </a:tr>
-              <a:tr h="548640">
+              <a:tr h="582168">
                 <a:tc>
                   <a:txBody>
                     <a:bodyPr/>
@@ -2532,7 +2532,7 @@
                   </a:tcPr>
                 </a:tc>
               </a:tr>
-              <a:tr h="548640">
+              <a:tr h="582168">
                 <a:tc>
                   <a:txBody>
                     <a:bodyPr/>
@@ -2683,7 +2683,7 @@
         <p:spPr>
           <a:xfrm>
             <a:off x="7955280" y="2514600"/>
-            <a:ext cx="3566160" cy="960120"/>
+            <a:ext cx="3596610" cy="960120"/>
           </a:xfrm>
           <a:prstGeom prst="roundRect">
             <a:avLst>
@@ -2710,7 +2710,7 @@
         <p:spPr>
           <a:xfrm>
             <a:off x="8211312" y="2660904"/>
-            <a:ext cx="3054096" cy="256032"/>
+            <a:ext cx="3084546" cy="256032"/>
           </a:xfrm>
           <a:prstGeom prst="rect">
             <a:avLst/>
@@ -2749,7 +2749,7 @@
         <p:spPr>
           <a:xfrm>
             <a:off x="8211312" y="2935224"/>
-            <a:ext cx="3054096" cy="393192"/>
+            <a:ext cx="3084546" cy="393192"/>
           </a:xfrm>
           <a:prstGeom prst="rect">
             <a:avLst/>
@@ -2788,7 +2788,7 @@
         <p:spPr>
           <a:xfrm>
             <a:off x="7955280" y="3730752"/>
-            <a:ext cx="3566160" cy="256032"/>
+            <a:ext cx="3596610" cy="256032"/>
           </a:xfrm>
           <a:prstGeom prst="rect">
             <a:avLst/>
@@ -2866,7 +2866,7 @@
         <p:spPr>
           <a:xfrm>
             <a:off x="8339328" y="4041648"/>
-            <a:ext cx="3182112" cy="292608"/>
+            <a:ext cx="3212562" cy="292608"/>
           </a:xfrm>
           <a:prstGeom prst="rect">
             <a:avLst/>
@@ -2944,7 +2944,7 @@
         <p:spPr>
           <a:xfrm>
             <a:off x="8339328" y="4370832"/>
-            <a:ext cx="3182112" cy="292608"/>
+            <a:ext cx="3212562" cy="292608"/>
           </a:xfrm>
           <a:prstGeom prst="rect">
             <a:avLst/>
@@ -3022,7 +3022,7 @@
         <p:spPr>
           <a:xfrm>
             <a:off x="8339328" y="4700016"/>
-            <a:ext cx="3182112" cy="292608"/>
+            <a:ext cx="3212562" cy="292608"/>
           </a:xfrm>
           <a:prstGeom prst="rect">
             <a:avLst/>
@@ -3061,7 +3061,7 @@
         <p:spPr>
           <a:xfrm>
             <a:off x="7955280" y="5138928"/>
-            <a:ext cx="3566160" cy="868680"/>
+            <a:ext cx="3596610" cy="868680"/>
           </a:xfrm>
           <a:prstGeom prst="roundRect">
             <a:avLst>
@@ -3088,7 +3088,7 @@
         <p:spPr>
           <a:xfrm>
             <a:off x="8211312" y="5285232"/>
-            <a:ext cx="3054096" cy="256032"/>
+            <a:ext cx="3084546" cy="256032"/>
           </a:xfrm>
           <a:prstGeom prst="rect">
             <a:avLst/>
@@ -3127,7 +3127,7 @@
         <p:spPr>
           <a:xfrm>
             <a:off x="8211312" y="5559552"/>
-            <a:ext cx="3054096" cy="301752"/>
+            <a:ext cx="3084546" cy="301752"/>
           </a:xfrm>
           <a:prstGeom prst="rect">
             <a:avLst/>
@@ -3300,7 +3300,7 @@
         <p:spPr>
           <a:xfrm>
             <a:off x="640080" y="2487168"/>
-            <a:ext cx="3502152" cy="960120"/>
+            <a:ext cx="3512302" cy="960120"/>
           </a:xfrm>
           <a:prstGeom prst="roundRect">
             <a:avLst>
@@ -3327,7 +3327,7 @@
         <p:spPr>
           <a:xfrm>
             <a:off x="896112" y="2633472"/>
-            <a:ext cx="2990088" cy="256032"/>
+            <a:ext cx="3000238" cy="256032"/>
           </a:xfrm>
           <a:prstGeom prst="rect">
             <a:avLst/>
@@ -3366,7 +3366,7 @@
         <p:spPr>
           <a:xfrm>
             <a:off x="896112" y="2907792"/>
-            <a:ext cx="2990088" cy="393192"/>
+            <a:ext cx="3000238" cy="393192"/>
           </a:xfrm>
           <a:prstGeom prst="rect">
             <a:avLst/>
@@ -3404,8 +3404,8 @@
         </p:nvSpPr>
         <p:spPr>
           <a:xfrm>
-            <a:off x="4329684" y="2487168"/>
-            <a:ext cx="3502152" cy="960120"/>
+            <a:off x="4339834" y="2487168"/>
+            <a:ext cx="3512302" cy="960120"/>
           </a:xfrm>
           <a:prstGeom prst="roundRect">
             <a:avLst>
@@ -3431,8 +3431,8 @@
         </p:nvSpPr>
         <p:spPr>
           <a:xfrm>
-            <a:off x="4585716" y="2633472"/>
-            <a:ext cx="2990088" cy="256032"/>
+            <a:off x="4595866" y="2633472"/>
+            <a:ext cx="3000238" cy="256032"/>
           </a:xfrm>
           <a:prstGeom prst="rect">
             <a:avLst/>
@@ -3470,8 +3470,8 @@
         </p:nvSpPr>
         <p:spPr>
           <a:xfrm>
-            <a:off x="4585716" y="2907792"/>
-            <a:ext cx="2990088" cy="393192"/>
+            <a:off x="4595866" y="2907792"/>
+            <a:ext cx="3000238" cy="393192"/>
           </a:xfrm>
           <a:prstGeom prst="rect">
             <a:avLst/>
@@ -3509,8 +3509,8 @@
         </p:nvSpPr>
         <p:spPr>
           <a:xfrm>
-            <a:off x="8019288" y="2487168"/>
-            <a:ext cx="3502152" cy="960120"/>
+            <a:off x="8039588" y="2487168"/>
+            <a:ext cx="3512302" cy="960120"/>
           </a:xfrm>
           <a:prstGeom prst="roundRect">
             <a:avLst>
@@ -3536,8 +3536,8 @@
         </p:nvSpPr>
         <p:spPr>
           <a:xfrm>
-            <a:off x="8275320" y="2633472"/>
-            <a:ext cx="2990088" cy="256032"/>
+            <a:off x="8295620" y="2633472"/>
+            <a:ext cx="3000238" cy="256032"/>
           </a:xfrm>
           <a:prstGeom prst="rect">
             <a:avLst/>
@@ -3575,8 +3575,8 @@
         </p:nvSpPr>
         <p:spPr>
           <a:xfrm>
-            <a:off x="8275320" y="2907792"/>
-            <a:ext cx="2990088" cy="393192"/>
+            <a:off x="8295620" y="2907792"/>
+            <a:ext cx="3000238" cy="393192"/>
           </a:xfrm>
           <a:prstGeom prst="rect">
             <a:avLst/>
@@ -4755,7 +4755,7 @@
         </p:nvSpPr>
         <p:spPr>
           <a:xfrm>
-            <a:off x="10744200" y="4041648"/>
+            <a:off x="10774650" y="4041648"/>
             <a:ext cx="777240" cy="292608"/>
           </a:xfrm>
           <a:prstGeom prst="rect">
@@ -4858,7 +4858,7 @@
         </p:nvSpPr>
         <p:spPr>
           <a:xfrm>
-            <a:off x="10744200" y="4425696"/>
+            <a:off x="10774650" y="4425696"/>
             <a:ext cx="777240" cy="292608"/>
           </a:xfrm>
           <a:prstGeom prst="rect">
@@ -4961,7 +4961,7 @@
         </p:nvSpPr>
         <p:spPr>
           <a:xfrm>
-            <a:off x="10744200" y="4809744"/>
+            <a:off x="10774650" y="4809744"/>
             <a:ext cx="777240" cy="292608"/>
           </a:xfrm>
           <a:prstGeom prst="rect">
@@ -5025,7 +5025,7 @@
                 <a:ea typeface="Arimo" pitchFamily="34" charset="-122"/>
                 <a:cs typeface="Arimo" pitchFamily="34" charset="-120"/>
               </a:rPr>
-              <a:t>*  Add the note for this line.</a:t>
+              <a:t>*  Spent only when affiliates are available for live selling.</a:t>
             </a:r>
             <a:endParaRPr lang="en-US" sz="1100" dirty="0"/>
           </a:p>
